--- a/docs/submission/chatxpt-slide-deck-proposal.pptx
+++ b/docs/submission/chatxpt-slide-deck-proposal.pptx
@@ -121,6 +121,11 @@
       </a:defRPr>
     </a:lvl9pPr>
   </p:defaultTextStyle>
+  <p:extLst>
+    <p:ext uri="{EFAFB233-063F-42B5-8137-9DF3F51BA10A}">
+      <p15:sldGuideLst xmlns:p15="http://schemas.microsoft.com/office/powerpoint/2012/main"/>
+    </p:ext>
+  </p:extLst>
 </p:presentation>
 </file>
 

--- a/docs/submission/chatxpt-slide-deck-proposal.pptx
+++ b/docs/submission/chatxpt-slide-deck-proposal.pptx
@@ -2546,12 +2546,28 @@
               </a:defRPr>
             </a:pPr>
             <a:r>
-              <a:rPr sz="1125" b="0">
+              <a:rPr lang="en-US" sz="1125" b="0" dirty="0">
                 <a:solidFill>
                   <a:srgbClr val="FFFFFF"/>
                 </a:solidFill>
               </a:rPr>
-              <a:t>Yong Chen Jun, Kevin (Team Lead)</a:t>
+              <a:t>Kevin Yong </a:t>
+            </a:r>
+            <a:r>
+              <a:rPr lang="en-SG" sz="1125" b="0" dirty="0">
+                <a:solidFill>
+                  <a:srgbClr val="FFFFFF"/>
+                </a:solidFill>
+              </a:rPr>
+              <a:t>(</a:t>
+            </a:r>
+            <a:r>
+              <a:rPr sz="1125" b="0" dirty="0">
+                <a:solidFill>
+                  <a:srgbClr val="FFFFFF"/>
+                </a:solidFill>
+              </a:rPr>
+              <a:t>Team Lead)</a:t>
             </a:r>
           </a:p>
           <a:p>
@@ -2563,7 +2579,7 @@
               </a:defRPr>
             </a:pPr>
             <a:r>
-              <a:rPr sz="1125" b="0">
+              <a:rPr sz="1125" b="0" dirty="0">
                 <a:solidFill>
                   <a:srgbClr val="FFFFFF"/>
                 </a:solidFill>
